--- a/bright-18-story-about.pptx
+++ b/bright-18-story-about.pptx
@@ -3088,20 +3088,12 @@
         <p:nvPr/>
       </p:nvGrpSpPr>
       <p:grpSpPr/>
-      <p:pic>
-        <p:nvPicPr>
-          <p:cNvPr id="2" name="Picture 1" descr="bright-18-story-about.png"/>
-          <p:cNvPicPr>
-            <a:picLocks noChangeAspect="1"/>
-          </p:cNvPicPr>
+      <p:sp>
+        <p:nvSpPr>
+          <p:cNvPr id="2" name="Rectangle 1"/>
+          <p:cNvSpPr/>
           <p:nvPr/>
-        </p:nvPicPr>
-        <p:blipFill>
-          <a:blip r:embed="rId2"/>
-          <a:stretch>
-            <a:fillRect/>
-          </a:stretch>
-        </p:blipFill>
+        </p:nvSpPr>
         <p:spPr>
           <a:xfrm>
             <a:off x="0" y="0"/>
@@ -3110,8 +3102,970 @@
           <a:prstGeom prst="rect">
             <a:avLst/>
           </a:prstGeom>
-        </p:spPr>
-      </p:pic>
+          <a:solidFill>
+            <a:srgbClr val="EDE7DD"/>
+          </a:solidFill>
+          <a:ln>
+            <a:noFill/>
+          </a:ln>
+          <a:effectLst/>
+        </p:spPr>
+        <p:style>
+          <a:lnRef idx="1">
+            <a:schemeClr val="accent1"/>
+          </a:lnRef>
+          <a:fillRef idx="3">
+            <a:schemeClr val="accent1"/>
+          </a:fillRef>
+          <a:effectRef idx="2">
+            <a:schemeClr val="accent1"/>
+          </a:effectRef>
+          <a:fontRef idx="minor">
+            <a:schemeClr val="lt1"/>
+          </a:fontRef>
+        </p:style>
+        <p:txBody>
+          <a:bodyPr rtlCol="0" anchor="ctr"/>
+          <a:lstStyle/>
+          <a:p>
+            <a:pPr algn="ctr"/>
+          </a:p>
+        </p:txBody>
+      </p:sp>
+      <p:sp>
+        <p:nvSpPr>
+          <p:cNvPr id="3" name="Rectangle 2"/>
+          <p:cNvSpPr/>
+          <p:nvPr/>
+        </p:nvSpPr>
+        <p:spPr>
+          <a:xfrm>
+            <a:off x="857250" y="1504950"/>
+            <a:ext cx="8572500" cy="9525"/>
+          </a:xfrm>
+          <a:prstGeom prst="rect">
+            <a:avLst/>
+          </a:prstGeom>
+          <a:solidFill>
+            <a:srgbClr val="BEC5B0"/>
+          </a:solidFill>
+          <a:ln>
+            <a:noFill/>
+          </a:ln>
+          <a:effectLst/>
+        </p:spPr>
+        <p:style>
+          <a:lnRef idx="1">
+            <a:schemeClr val="accent1"/>
+          </a:lnRef>
+          <a:fillRef idx="3">
+            <a:schemeClr val="accent1"/>
+          </a:fillRef>
+          <a:effectRef idx="2">
+            <a:schemeClr val="accent1"/>
+          </a:effectRef>
+          <a:fontRef idx="minor">
+            <a:schemeClr val="lt1"/>
+          </a:fontRef>
+        </p:style>
+        <p:txBody>
+          <a:bodyPr rtlCol="0" anchor="ctr"/>
+          <a:lstStyle/>
+          <a:p>
+            <a:pPr algn="ctr"/>
+          </a:p>
+        </p:txBody>
+      </p:sp>
+      <p:sp>
+        <p:nvSpPr>
+          <p:cNvPr id="4" name="Oval 3"/>
+          <p:cNvSpPr/>
+          <p:nvPr/>
+        </p:nvSpPr>
+        <p:spPr>
+          <a:xfrm>
+            <a:off x="857250" y="866775"/>
+            <a:ext cx="381000" cy="381000"/>
+          </a:xfrm>
+          <a:prstGeom prst="ellipse">
+            <a:avLst/>
+          </a:prstGeom>
+          <a:noFill/>
+          <a:ln w="9525">
+            <a:solidFill>
+              <a:srgbClr val="97A98C"/>
+            </a:solidFill>
+          </a:ln>
+          <a:effectLst/>
+        </p:spPr>
+        <p:style>
+          <a:lnRef idx="1">
+            <a:schemeClr val="accent1"/>
+          </a:lnRef>
+          <a:fillRef idx="3">
+            <a:schemeClr val="accent1"/>
+          </a:fillRef>
+          <a:effectRef idx="2">
+            <a:schemeClr val="accent1"/>
+          </a:effectRef>
+          <a:fontRef idx="minor">
+            <a:schemeClr val="lt1"/>
+          </a:fontRef>
+        </p:style>
+        <p:txBody>
+          <a:bodyPr rtlCol="0" anchor="ctr"/>
+          <a:lstStyle/>
+          <a:p>
+            <a:pPr algn="ctr"/>
+          </a:p>
+        </p:txBody>
+      </p:sp>
+      <p:sp>
+        <p:nvSpPr>
+          <p:cNvPr id="5" name="Rectangle 4"/>
+          <p:cNvSpPr/>
+          <p:nvPr/>
+        </p:nvSpPr>
+        <p:spPr>
+          <a:xfrm>
+            <a:off x="3777109" y="5457825"/>
+            <a:ext cx="666750" cy="9525"/>
+          </a:xfrm>
+          <a:prstGeom prst="rect">
+            <a:avLst/>
+          </a:prstGeom>
+          <a:solidFill>
+            <a:srgbClr val="97A98C"/>
+          </a:solidFill>
+          <a:ln>
+            <a:noFill/>
+          </a:ln>
+          <a:effectLst/>
+        </p:spPr>
+        <p:style>
+          <a:lnRef idx="1">
+            <a:schemeClr val="accent1"/>
+          </a:lnRef>
+          <a:fillRef idx="3">
+            <a:schemeClr val="accent1"/>
+          </a:fillRef>
+          <a:effectRef idx="2">
+            <a:schemeClr val="accent1"/>
+          </a:effectRef>
+          <a:fontRef idx="minor">
+            <a:schemeClr val="lt1"/>
+          </a:fontRef>
+        </p:style>
+        <p:txBody>
+          <a:bodyPr rtlCol="0" anchor="ctr"/>
+          <a:lstStyle/>
+          <a:p>
+            <a:pPr algn="ctr"/>
+          </a:p>
+        </p:txBody>
+      </p:sp>
+      <p:sp>
+        <p:nvSpPr>
+          <p:cNvPr id="6" name="Rectangle 5"/>
+          <p:cNvSpPr/>
+          <p:nvPr/>
+        </p:nvSpPr>
+        <p:spPr>
+          <a:xfrm>
+            <a:off x="5842992" y="5457825"/>
+            <a:ext cx="666750" cy="9525"/>
+          </a:xfrm>
+          <a:prstGeom prst="rect">
+            <a:avLst/>
+          </a:prstGeom>
+          <a:solidFill>
+            <a:srgbClr val="97A98C"/>
+          </a:solidFill>
+          <a:ln>
+            <a:noFill/>
+          </a:ln>
+          <a:effectLst/>
+        </p:spPr>
+        <p:style>
+          <a:lnRef idx="1">
+            <a:schemeClr val="accent1"/>
+          </a:lnRef>
+          <a:fillRef idx="3">
+            <a:schemeClr val="accent1"/>
+          </a:fillRef>
+          <a:effectRef idx="2">
+            <a:schemeClr val="accent1"/>
+          </a:effectRef>
+          <a:fontRef idx="minor">
+            <a:schemeClr val="lt1"/>
+          </a:fontRef>
+        </p:style>
+        <p:txBody>
+          <a:bodyPr rtlCol="0" anchor="ctr"/>
+          <a:lstStyle/>
+          <a:p>
+            <a:pPr algn="ctr"/>
+          </a:p>
+        </p:txBody>
+      </p:sp>
+      <p:sp>
+        <p:nvSpPr>
+          <p:cNvPr id="7" name="Rectangle 6"/>
+          <p:cNvSpPr/>
+          <p:nvPr/>
+        </p:nvSpPr>
+        <p:spPr>
+          <a:xfrm>
+            <a:off x="3714750" y="5929312"/>
+            <a:ext cx="2857500" cy="2857500"/>
+          </a:xfrm>
+          <a:prstGeom prst="rect">
+            <a:avLst/>
+          </a:prstGeom>
+          <a:solidFill>
+            <a:srgbClr val="EDE7DD"/>
+          </a:solidFill>
+          <a:ln>
+            <a:noFill/>
+          </a:ln>
+          <a:effectLst/>
+        </p:spPr>
+        <p:style>
+          <a:lnRef idx="1">
+            <a:schemeClr val="accent1"/>
+          </a:lnRef>
+          <a:fillRef idx="3">
+            <a:schemeClr val="accent1"/>
+          </a:fillRef>
+          <a:effectRef idx="2">
+            <a:schemeClr val="accent1"/>
+          </a:effectRef>
+          <a:fontRef idx="minor">
+            <a:schemeClr val="lt1"/>
+          </a:fontRef>
+        </p:style>
+        <p:txBody>
+          <a:bodyPr rtlCol="0" anchor="ctr"/>
+          <a:lstStyle/>
+          <a:p>
+            <a:pPr algn="ctr"/>
+          </a:p>
+        </p:txBody>
+      </p:sp>
+      <p:sp>
+        <p:nvSpPr>
+          <p:cNvPr id="8" name="Rectangle 7"/>
+          <p:cNvSpPr/>
+          <p:nvPr/>
+        </p:nvSpPr>
+        <p:spPr>
+          <a:xfrm>
+            <a:off x="3714750" y="5929312"/>
+            <a:ext cx="2857500" cy="9525"/>
+          </a:xfrm>
+          <a:prstGeom prst="rect">
+            <a:avLst/>
+          </a:prstGeom>
+          <a:solidFill>
+            <a:srgbClr val="CBCEBD"/>
+          </a:solidFill>
+          <a:ln>
+            <a:noFill/>
+          </a:ln>
+          <a:effectLst/>
+        </p:spPr>
+        <p:style>
+          <a:lnRef idx="1">
+            <a:schemeClr val="accent1"/>
+          </a:lnRef>
+          <a:fillRef idx="3">
+            <a:schemeClr val="accent1"/>
+          </a:fillRef>
+          <a:effectRef idx="2">
+            <a:schemeClr val="accent1"/>
+          </a:effectRef>
+          <a:fontRef idx="minor">
+            <a:schemeClr val="lt1"/>
+          </a:fontRef>
+        </p:style>
+        <p:txBody>
+          <a:bodyPr rtlCol="0" anchor="ctr"/>
+          <a:lstStyle/>
+          <a:p>
+            <a:pPr algn="ctr"/>
+          </a:p>
+        </p:txBody>
+      </p:sp>
+      <p:sp>
+        <p:nvSpPr>
+          <p:cNvPr id="9" name="Rectangle 8"/>
+          <p:cNvSpPr/>
+          <p:nvPr/>
+        </p:nvSpPr>
+        <p:spPr>
+          <a:xfrm>
+            <a:off x="3714750" y="8777288"/>
+            <a:ext cx="2857500" cy="9525"/>
+          </a:xfrm>
+          <a:prstGeom prst="rect">
+            <a:avLst/>
+          </a:prstGeom>
+          <a:solidFill>
+            <a:srgbClr val="CBCEBD"/>
+          </a:solidFill>
+          <a:ln>
+            <a:noFill/>
+          </a:ln>
+          <a:effectLst/>
+        </p:spPr>
+        <p:style>
+          <a:lnRef idx="1">
+            <a:schemeClr val="accent1"/>
+          </a:lnRef>
+          <a:fillRef idx="3">
+            <a:schemeClr val="accent1"/>
+          </a:fillRef>
+          <a:effectRef idx="2">
+            <a:schemeClr val="accent1"/>
+          </a:effectRef>
+          <a:fontRef idx="minor">
+            <a:schemeClr val="lt1"/>
+          </a:fontRef>
+        </p:style>
+        <p:txBody>
+          <a:bodyPr rtlCol="0" anchor="ctr"/>
+          <a:lstStyle/>
+          <a:p>
+            <a:pPr algn="ctr"/>
+          </a:p>
+        </p:txBody>
+      </p:sp>
+      <p:sp>
+        <p:nvSpPr>
+          <p:cNvPr id="10" name="Rectangle 9"/>
+          <p:cNvSpPr/>
+          <p:nvPr/>
+        </p:nvSpPr>
+        <p:spPr>
+          <a:xfrm>
+            <a:off x="3714750" y="5929312"/>
+            <a:ext cx="9525" cy="2857500"/>
+          </a:xfrm>
+          <a:prstGeom prst="rect">
+            <a:avLst/>
+          </a:prstGeom>
+          <a:solidFill>
+            <a:srgbClr val="CBCEBD"/>
+          </a:solidFill>
+          <a:ln>
+            <a:noFill/>
+          </a:ln>
+          <a:effectLst/>
+        </p:spPr>
+        <p:style>
+          <a:lnRef idx="1">
+            <a:schemeClr val="accent1"/>
+          </a:lnRef>
+          <a:fillRef idx="3">
+            <a:schemeClr val="accent1"/>
+          </a:fillRef>
+          <a:effectRef idx="2">
+            <a:schemeClr val="accent1"/>
+          </a:effectRef>
+          <a:fontRef idx="minor">
+            <a:schemeClr val="lt1"/>
+          </a:fontRef>
+        </p:style>
+        <p:txBody>
+          <a:bodyPr rtlCol="0" anchor="ctr"/>
+          <a:lstStyle/>
+          <a:p>
+            <a:pPr algn="ctr"/>
+          </a:p>
+        </p:txBody>
+      </p:sp>
+      <p:sp>
+        <p:nvSpPr>
+          <p:cNvPr id="11" name="Rectangle 10"/>
+          <p:cNvSpPr/>
+          <p:nvPr/>
+        </p:nvSpPr>
+        <p:spPr>
+          <a:xfrm>
+            <a:off x="6562725" y="5929312"/>
+            <a:ext cx="9525" cy="2857500"/>
+          </a:xfrm>
+          <a:prstGeom prst="rect">
+            <a:avLst/>
+          </a:prstGeom>
+          <a:solidFill>
+            <a:srgbClr val="CBCEBD"/>
+          </a:solidFill>
+          <a:ln>
+            <a:noFill/>
+          </a:ln>
+          <a:effectLst/>
+        </p:spPr>
+        <p:style>
+          <a:lnRef idx="1">
+            <a:schemeClr val="accent1"/>
+          </a:lnRef>
+          <a:fillRef idx="3">
+            <a:schemeClr val="accent1"/>
+          </a:fillRef>
+          <a:effectRef idx="2">
+            <a:schemeClr val="accent1"/>
+          </a:effectRef>
+          <a:fontRef idx="minor">
+            <a:schemeClr val="lt1"/>
+          </a:fontRef>
+        </p:style>
+        <p:txBody>
+          <a:bodyPr rtlCol="0" anchor="ctr"/>
+          <a:lstStyle/>
+          <a:p>
+            <a:pPr algn="ctr"/>
+          </a:p>
+        </p:txBody>
+      </p:sp>
+      <p:sp>
+        <p:nvSpPr>
+          <p:cNvPr id="12" name="Rectangle 11"/>
+          <p:cNvSpPr/>
+          <p:nvPr/>
+        </p:nvSpPr>
+        <p:spPr>
+          <a:xfrm>
+            <a:off x="4110038" y="16535400"/>
+            <a:ext cx="2066925" cy="9525"/>
+          </a:xfrm>
+          <a:prstGeom prst="rect">
+            <a:avLst/>
+          </a:prstGeom>
+          <a:solidFill>
+            <a:srgbClr val="97A98C"/>
+          </a:solidFill>
+          <a:ln>
+            <a:noFill/>
+          </a:ln>
+          <a:effectLst/>
+        </p:spPr>
+        <p:style>
+          <a:lnRef idx="1">
+            <a:schemeClr val="accent1"/>
+          </a:lnRef>
+          <a:fillRef idx="3">
+            <a:schemeClr val="accent1"/>
+          </a:fillRef>
+          <a:effectRef idx="2">
+            <a:schemeClr val="accent1"/>
+          </a:effectRef>
+          <a:fontRef idx="minor">
+            <a:schemeClr val="lt1"/>
+          </a:fontRef>
+        </p:style>
+        <p:txBody>
+          <a:bodyPr rtlCol="0" anchor="ctr"/>
+          <a:lstStyle/>
+          <a:p>
+            <a:pPr algn="ctr"/>
+          </a:p>
+        </p:txBody>
+      </p:sp>
+      <p:sp>
+        <p:nvSpPr>
+          <p:cNvPr id="13" name="Rectangle 12"/>
+          <p:cNvSpPr/>
+          <p:nvPr/>
+        </p:nvSpPr>
+        <p:spPr>
+          <a:xfrm>
+            <a:off x="4110038" y="17021175"/>
+            <a:ext cx="2066925" cy="9525"/>
+          </a:xfrm>
+          <a:prstGeom prst="rect">
+            <a:avLst/>
+          </a:prstGeom>
+          <a:solidFill>
+            <a:srgbClr val="97A98C"/>
+          </a:solidFill>
+          <a:ln>
+            <a:noFill/>
+          </a:ln>
+          <a:effectLst/>
+        </p:spPr>
+        <p:style>
+          <a:lnRef idx="1">
+            <a:schemeClr val="accent1"/>
+          </a:lnRef>
+          <a:fillRef idx="3">
+            <a:schemeClr val="accent1"/>
+          </a:fillRef>
+          <a:effectRef idx="2">
+            <a:schemeClr val="accent1"/>
+          </a:effectRef>
+          <a:fontRef idx="minor">
+            <a:schemeClr val="lt1"/>
+          </a:fontRef>
+        </p:style>
+        <p:txBody>
+          <a:bodyPr rtlCol="0" anchor="ctr"/>
+          <a:lstStyle/>
+          <a:p>
+            <a:pPr algn="ctr"/>
+          </a:p>
+        </p:txBody>
+      </p:sp>
+      <p:sp>
+        <p:nvSpPr>
+          <p:cNvPr id="14" name="Rectangle 13"/>
+          <p:cNvSpPr/>
+          <p:nvPr/>
+        </p:nvSpPr>
+        <p:spPr>
+          <a:xfrm>
+            <a:off x="4110038" y="16535400"/>
+            <a:ext cx="9525" cy="495300"/>
+          </a:xfrm>
+          <a:prstGeom prst="rect">
+            <a:avLst/>
+          </a:prstGeom>
+          <a:solidFill>
+            <a:srgbClr val="97A98C"/>
+          </a:solidFill>
+          <a:ln>
+            <a:noFill/>
+          </a:ln>
+          <a:effectLst/>
+        </p:spPr>
+        <p:style>
+          <a:lnRef idx="1">
+            <a:schemeClr val="accent1"/>
+          </a:lnRef>
+          <a:fillRef idx="3">
+            <a:schemeClr val="accent1"/>
+          </a:fillRef>
+          <a:effectRef idx="2">
+            <a:schemeClr val="accent1"/>
+          </a:effectRef>
+          <a:fontRef idx="minor">
+            <a:schemeClr val="lt1"/>
+          </a:fontRef>
+        </p:style>
+        <p:txBody>
+          <a:bodyPr rtlCol="0" anchor="ctr"/>
+          <a:lstStyle/>
+          <a:p>
+            <a:pPr algn="ctr"/>
+          </a:p>
+        </p:txBody>
+      </p:sp>
+      <p:sp>
+        <p:nvSpPr>
+          <p:cNvPr id="15" name="Rectangle 14"/>
+          <p:cNvSpPr/>
+          <p:nvPr/>
+        </p:nvSpPr>
+        <p:spPr>
+          <a:xfrm>
+            <a:off x="6167438" y="16535400"/>
+            <a:ext cx="9525" cy="495300"/>
+          </a:xfrm>
+          <a:prstGeom prst="rect">
+            <a:avLst/>
+          </a:prstGeom>
+          <a:solidFill>
+            <a:srgbClr val="97A98C"/>
+          </a:solidFill>
+          <a:ln>
+            <a:noFill/>
+          </a:ln>
+          <a:effectLst/>
+        </p:spPr>
+        <p:style>
+          <a:lnRef idx="1">
+            <a:schemeClr val="accent1"/>
+          </a:lnRef>
+          <a:fillRef idx="3">
+            <a:schemeClr val="accent1"/>
+          </a:fillRef>
+          <a:effectRef idx="2">
+            <a:schemeClr val="accent1"/>
+          </a:effectRef>
+          <a:fontRef idx="minor">
+            <a:schemeClr val="lt1"/>
+          </a:fontRef>
+        </p:style>
+        <p:txBody>
+          <a:bodyPr rtlCol="0" anchor="ctr"/>
+          <a:lstStyle/>
+          <a:p>
+            <a:pPr algn="ctr"/>
+          </a:p>
+        </p:txBody>
+      </p:sp>
+      <p:sp>
+        <p:nvSpPr>
+          <p:cNvPr id="16" name="TextBox 15"/>
+          <p:cNvSpPr txBox="1"/>
+          <p:nvPr/>
+        </p:nvSpPr>
+        <p:spPr>
+          <a:xfrm>
+            <a:off x="919162" y="971550"/>
+            <a:ext cx="792480" cy="171450"/>
+          </a:xfrm>
+          <a:prstGeom prst="rect">
+            <a:avLst/>
+          </a:prstGeom>
+          <a:noFill/>
+        </p:spPr>
+        <p:txBody>
+          <a:bodyPr wrap="none" anchor="t" lIns="0" rIns="0" tIns="0" bIns="0"/>
+          <a:lstStyle/>
+          <a:p>
+            <a:pPr algn="l">
+              <a:lnSpc>
+                <a:spcPct val="100000"/>
+              </a:lnSpc>
+            </a:pPr>
+            <a:r>
+              <a:rPr sz="1350" i="0" b="0">
+                <a:solidFill>
+                  <a:srgbClr val="97A98C"/>
+                </a:solidFill>
+                <a:latin typeface="Cormorant Garamond"/>
+                <a:ea typeface="Cormorant Garamond"/>
+                <a:cs typeface="Cormorant Garamond"/>
+              </a:rPr>
+              <a:t>ME</a:t>
+            </a:r>
+          </a:p>
+        </p:txBody>
+      </p:sp>
+      <p:sp>
+        <p:nvSpPr>
+          <p:cNvPr id="17" name="TextBox 16"/>
+          <p:cNvSpPr txBox="1"/>
+          <p:nvPr/>
+        </p:nvSpPr>
+        <p:spPr>
+          <a:xfrm>
+            <a:off x="1390650" y="857250"/>
+            <a:ext cx="3282315" cy="228600"/>
+          </a:xfrm>
+          <a:prstGeom prst="rect">
+            <a:avLst/>
+          </a:prstGeom>
+          <a:noFill/>
+        </p:spPr>
+        <p:txBody>
+          <a:bodyPr wrap="none" anchor="t" lIns="0" rIns="0" tIns="0" bIns="0"/>
+          <a:lstStyle/>
+          <a:p>
+            <a:pPr algn="l">
+              <a:lnSpc>
+                <a:spcPct val="100000"/>
+              </a:lnSpc>
+            </a:pPr>
+            <a:r>
+              <a:rPr sz="1800" i="0" b="0">
+                <a:solidFill>
+                  <a:srgbClr val="33322E"/>
+                </a:solidFill>
+                <a:latin typeface="Cormorant Garamond"/>
+                <a:ea typeface="Cormorant Garamond"/>
+                <a:cs typeface="Cormorant Garamond"/>
+              </a:rPr>
+              <a:t>Maya Ellison</a:t>
+            </a:r>
+          </a:p>
+        </p:txBody>
+      </p:sp>
+      <p:sp>
+        <p:nvSpPr>
+          <p:cNvPr id="18" name="TextBox 17"/>
+          <p:cNvSpPr txBox="1"/>
+          <p:nvPr/>
+        </p:nvSpPr>
+        <p:spPr>
+          <a:xfrm>
+            <a:off x="1390650" y="1133475"/>
+            <a:ext cx="3282315" cy="123825"/>
+          </a:xfrm>
+          <a:prstGeom prst="rect">
+            <a:avLst/>
+          </a:prstGeom>
+          <a:noFill/>
+        </p:spPr>
+        <p:txBody>
+          <a:bodyPr wrap="none" anchor="t" lIns="0" rIns="0" tIns="0" bIns="0"/>
+          <a:lstStyle/>
+          <a:p>
+            <a:pPr algn="l"/>
+            <a:r>
+              <a:rPr sz="637" i="0" b="0" spc="216">
+                <a:solidFill>
+                  <a:srgbClr val="8A867E"/>
+                </a:solidFill>
+                <a:latin typeface="Poppins"/>
+                <a:ea typeface="Poppins"/>
+                <a:cs typeface="Poppins"/>
+              </a:rPr>
+              <a:t>REALTOR®  |  MODERN LIVING</a:t>
+            </a:r>
+          </a:p>
+        </p:txBody>
+      </p:sp>
+      <p:sp>
+        <p:nvSpPr>
+          <p:cNvPr id="19" name="TextBox 18"/>
+          <p:cNvSpPr txBox="1"/>
+          <p:nvPr/>
+        </p:nvSpPr>
+        <p:spPr>
+          <a:xfrm>
+            <a:off x="4138419" y="5376862"/>
+            <a:ext cx="2010013" cy="171450"/>
+          </a:xfrm>
+          <a:prstGeom prst="rect">
+            <a:avLst/>
+          </a:prstGeom>
+          <a:noFill/>
+        </p:spPr>
+        <p:txBody>
+          <a:bodyPr wrap="none" anchor="t" lIns="0" rIns="0" tIns="0" bIns="0"/>
+          <a:lstStyle/>
+          <a:p>
+            <a:pPr algn="ctr"/>
+            <a:r>
+              <a:rPr sz="937" i="0" b="0" spc="412">
+                <a:solidFill>
+                  <a:srgbClr val="97A98C"/>
+                </a:solidFill>
+                <a:latin typeface="Poppins"/>
+                <a:ea typeface="Poppins"/>
+                <a:cs typeface="Poppins"/>
+              </a:rPr>
+              <a:t>ABOUT ME</a:t>
+            </a:r>
+          </a:p>
+        </p:txBody>
+      </p:sp>
+      <p:sp>
+        <p:nvSpPr>
+          <p:cNvPr id="20" name="TextBox 19"/>
+          <p:cNvSpPr txBox="1"/>
+          <p:nvPr/>
+        </p:nvSpPr>
+        <p:spPr>
+          <a:xfrm>
+            <a:off x="4316537" y="7277100"/>
+            <a:ext cx="1653778" cy="161925"/>
+          </a:xfrm>
+          <a:prstGeom prst="rect">
+            <a:avLst/>
+          </a:prstGeom>
+          <a:noFill/>
+        </p:spPr>
+        <p:txBody>
+          <a:bodyPr wrap="none" anchor="t" lIns="0" rIns="0" tIns="0" bIns="0"/>
+          <a:lstStyle/>
+          <a:p>
+            <a:pPr algn="ctr"/>
+            <a:r>
+              <a:rPr sz="825" i="0" b="0" spc="247">
+                <a:solidFill>
+                  <a:srgbClr val="8A867E"/>
+                </a:solidFill>
+                <a:latin typeface="Poppins"/>
+                <a:ea typeface="Poppins"/>
+                <a:cs typeface="Poppins"/>
+              </a:rPr>
+              <a:t>HEADSHOT</a:t>
+            </a:r>
+          </a:p>
+        </p:txBody>
+      </p:sp>
+      <p:sp>
+        <p:nvSpPr>
+          <p:cNvPr id="21" name="TextBox 20"/>
+          <p:cNvSpPr txBox="1"/>
+          <p:nvPr/>
+        </p:nvSpPr>
+        <p:spPr>
+          <a:xfrm>
+            <a:off x="-1905000" y="9129712"/>
+            <a:ext cx="14097000" cy="952500"/>
+          </a:xfrm>
+          <a:prstGeom prst="rect">
+            <a:avLst/>
+          </a:prstGeom>
+          <a:noFill/>
+        </p:spPr>
+        <p:txBody>
+          <a:bodyPr wrap="none" anchor="t" lIns="0" rIns="0" tIns="0" bIns="0"/>
+          <a:lstStyle/>
+          <a:p>
+            <a:pPr algn="ctr"/>
+            <a:r>
+              <a:rPr sz="6450" i="1" b="0">
+                <a:solidFill>
+                  <a:srgbClr val="33322E"/>
+                </a:solidFill>
+                <a:latin typeface="Cormorant Garamond"/>
+                <a:ea typeface="Cormorant Garamond"/>
+                <a:cs typeface="Cormorant Garamond"/>
+              </a:rPr>
+              <a:t>Maya Ellison</a:t>
+            </a:r>
+          </a:p>
+        </p:txBody>
+      </p:sp>
+      <p:sp>
+        <p:nvSpPr>
+          <p:cNvPr id="22" name="TextBox 21"/>
+          <p:cNvSpPr txBox="1"/>
+          <p:nvPr/>
+        </p:nvSpPr>
+        <p:spPr>
+          <a:xfrm>
+            <a:off x="-1905000" y="10196512"/>
+            <a:ext cx="14097000" cy="171450"/>
+          </a:xfrm>
+          <a:prstGeom prst="rect">
+            <a:avLst/>
+          </a:prstGeom>
+          <a:noFill/>
+        </p:spPr>
+        <p:txBody>
+          <a:bodyPr wrap="none" anchor="t" lIns="0" rIns="0" tIns="0" bIns="0"/>
+          <a:lstStyle/>
+          <a:p>
+            <a:pPr algn="ctr"/>
+            <a:r>
+              <a:rPr sz="900" i="0" b="0" spc="288">
+                <a:solidFill>
+                  <a:srgbClr val="8A867E"/>
+                </a:solidFill>
+                <a:latin typeface="Poppins"/>
+                <a:ea typeface="Poppins"/>
+                <a:cs typeface="Poppins"/>
+              </a:rPr>
+              <a:t>REALTOR®  |  MODERN LIVING</a:t>
+            </a:r>
+          </a:p>
+        </p:txBody>
+      </p:sp>
+      <p:sp>
+        <p:nvSpPr>
+          <p:cNvPr id="23" name="TextBox 22"/>
+          <p:cNvSpPr txBox="1"/>
+          <p:nvPr/>
+        </p:nvSpPr>
+        <p:spPr>
+          <a:xfrm>
+            <a:off x="1714500" y="10653712"/>
+            <a:ext cx="6858000" cy="615255"/>
+          </a:xfrm>
+          <a:prstGeom prst="rect">
+            <a:avLst/>
+          </a:prstGeom>
+          <a:noFill/>
+        </p:spPr>
+        <p:txBody>
+          <a:bodyPr wrap="square" anchor="t" lIns="0" rIns="0" tIns="0" bIns="0"/>
+          <a:lstStyle/>
+          <a:p>
+            <a:pPr algn="ctr">
+              <a:lnSpc>
+                <a:spcPct val="170000"/>
+              </a:lnSpc>
+            </a:pPr>
+            <a:r>
+              <a:rPr sz="1425" i="0" b="0">
+                <a:solidFill>
+                  <a:srgbClr val="33322E"/>
+                </a:solidFill>
+                <a:latin typeface="Lato"/>
+                <a:ea typeface="Lato"/>
+                <a:cs typeface="Lato"/>
+              </a:rPr>
+              <a:t>Modern marketing, honest guidance, and a calm hand through every step of your move.</a:t>
+            </a:r>
+          </a:p>
+        </p:txBody>
+      </p:sp>
+      <p:sp>
+        <p:nvSpPr>
+          <p:cNvPr id="24" name="TextBox 23"/>
+          <p:cNvSpPr txBox="1"/>
+          <p:nvPr/>
+        </p:nvSpPr>
+        <p:spPr>
+          <a:xfrm>
+            <a:off x="4110038" y="16535400"/>
+            <a:ext cx="2066925" cy="495300"/>
+          </a:xfrm>
+          <a:prstGeom prst="rect">
+            <a:avLst/>
+          </a:prstGeom>
+          <a:noFill/>
+        </p:spPr>
+        <p:txBody>
+          <a:bodyPr wrap="square" anchor="t" lIns="0" rIns="0" tIns="0" bIns="0"/>
+          <a:lstStyle/>
+          <a:p>
+            <a:pPr algn="ctr"/>
+            <a:r>
+              <a:rPr sz="900" i="0" b="0" spc="270">
+                <a:solidFill>
+                  <a:srgbClr val="97A98C"/>
+                </a:solidFill>
+                <a:latin typeface="Poppins"/>
+                <a:ea typeface="Poppins"/>
+                <a:cs typeface="Poppins"/>
+              </a:rPr>
+              <a:t>LET’S CONNECT</a:t>
+            </a:r>
+          </a:p>
+        </p:txBody>
+      </p:sp>
+      <p:sp>
+        <p:nvSpPr>
+          <p:cNvPr id="25" name="TextBox 24"/>
+          <p:cNvSpPr txBox="1"/>
+          <p:nvPr/>
+        </p:nvSpPr>
+        <p:spPr>
+          <a:xfrm>
+            <a:off x="-1905000" y="17278350"/>
+            <a:ext cx="14097000" cy="152400"/>
+          </a:xfrm>
+          <a:prstGeom prst="rect">
+            <a:avLst/>
+          </a:prstGeom>
+          <a:noFill/>
+        </p:spPr>
+        <p:txBody>
+          <a:bodyPr wrap="none" anchor="t" lIns="0" rIns="0" tIns="0" bIns="0"/>
+          <a:lstStyle/>
+          <a:p>
+            <a:pPr algn="ctr"/>
+            <a:r>
+              <a:rPr sz="750" i="0" b="0" spc="210">
+                <a:solidFill>
+                  <a:srgbClr val="8A867E"/>
+                </a:solidFill>
+                <a:latin typeface="Poppins"/>
+                <a:ea typeface="Poppins"/>
+                <a:cs typeface="Poppins"/>
+              </a:rPr>
+              <a:t>@MAYAELLISON · MAYAELLISON.COM</a:t>
+            </a:r>
+          </a:p>
+        </p:txBody>
+      </p:sp>
     </p:spTree>
   </p:cSld>
   <p:clrMapOvr>

--- a/bright-18-story-about.pptx
+++ b/bright-18-story-about.pptx
@@ -3316,226 +3316,6 @@
         </p:nvSpPr>
         <p:spPr>
           <a:xfrm>
-            <a:off x="3714750" y="5929312"/>
-            <a:ext cx="2857500" cy="2857500"/>
-          </a:xfrm>
-          <a:prstGeom prst="rect">
-            <a:avLst/>
-          </a:prstGeom>
-          <a:solidFill>
-            <a:srgbClr val="EDE7DD"/>
-          </a:solidFill>
-          <a:ln>
-            <a:noFill/>
-          </a:ln>
-          <a:effectLst/>
-        </p:spPr>
-        <p:style>
-          <a:lnRef idx="1">
-            <a:schemeClr val="accent1"/>
-          </a:lnRef>
-          <a:fillRef idx="3">
-            <a:schemeClr val="accent1"/>
-          </a:fillRef>
-          <a:effectRef idx="2">
-            <a:schemeClr val="accent1"/>
-          </a:effectRef>
-          <a:fontRef idx="minor">
-            <a:schemeClr val="lt1"/>
-          </a:fontRef>
-        </p:style>
-        <p:txBody>
-          <a:bodyPr rtlCol="0" anchor="ctr"/>
-          <a:lstStyle/>
-          <a:p>
-            <a:pPr algn="ctr"/>
-          </a:p>
-        </p:txBody>
-      </p:sp>
-      <p:sp>
-        <p:nvSpPr>
-          <p:cNvPr id="8" name="Rectangle 7"/>
-          <p:cNvSpPr/>
-          <p:nvPr/>
-        </p:nvSpPr>
-        <p:spPr>
-          <a:xfrm>
-            <a:off x="3714750" y="5929312"/>
-            <a:ext cx="2857500" cy="9525"/>
-          </a:xfrm>
-          <a:prstGeom prst="rect">
-            <a:avLst/>
-          </a:prstGeom>
-          <a:solidFill>
-            <a:srgbClr val="CBCEBD"/>
-          </a:solidFill>
-          <a:ln>
-            <a:noFill/>
-          </a:ln>
-          <a:effectLst/>
-        </p:spPr>
-        <p:style>
-          <a:lnRef idx="1">
-            <a:schemeClr val="accent1"/>
-          </a:lnRef>
-          <a:fillRef idx="3">
-            <a:schemeClr val="accent1"/>
-          </a:fillRef>
-          <a:effectRef idx="2">
-            <a:schemeClr val="accent1"/>
-          </a:effectRef>
-          <a:fontRef idx="minor">
-            <a:schemeClr val="lt1"/>
-          </a:fontRef>
-        </p:style>
-        <p:txBody>
-          <a:bodyPr rtlCol="0" anchor="ctr"/>
-          <a:lstStyle/>
-          <a:p>
-            <a:pPr algn="ctr"/>
-          </a:p>
-        </p:txBody>
-      </p:sp>
-      <p:sp>
-        <p:nvSpPr>
-          <p:cNvPr id="9" name="Rectangle 8"/>
-          <p:cNvSpPr/>
-          <p:nvPr/>
-        </p:nvSpPr>
-        <p:spPr>
-          <a:xfrm>
-            <a:off x="3714750" y="8777288"/>
-            <a:ext cx="2857500" cy="9525"/>
-          </a:xfrm>
-          <a:prstGeom prst="rect">
-            <a:avLst/>
-          </a:prstGeom>
-          <a:solidFill>
-            <a:srgbClr val="CBCEBD"/>
-          </a:solidFill>
-          <a:ln>
-            <a:noFill/>
-          </a:ln>
-          <a:effectLst/>
-        </p:spPr>
-        <p:style>
-          <a:lnRef idx="1">
-            <a:schemeClr val="accent1"/>
-          </a:lnRef>
-          <a:fillRef idx="3">
-            <a:schemeClr val="accent1"/>
-          </a:fillRef>
-          <a:effectRef idx="2">
-            <a:schemeClr val="accent1"/>
-          </a:effectRef>
-          <a:fontRef idx="minor">
-            <a:schemeClr val="lt1"/>
-          </a:fontRef>
-        </p:style>
-        <p:txBody>
-          <a:bodyPr rtlCol="0" anchor="ctr"/>
-          <a:lstStyle/>
-          <a:p>
-            <a:pPr algn="ctr"/>
-          </a:p>
-        </p:txBody>
-      </p:sp>
-      <p:sp>
-        <p:nvSpPr>
-          <p:cNvPr id="10" name="Rectangle 9"/>
-          <p:cNvSpPr/>
-          <p:nvPr/>
-        </p:nvSpPr>
-        <p:spPr>
-          <a:xfrm>
-            <a:off x="3714750" y="5929312"/>
-            <a:ext cx="9525" cy="2857500"/>
-          </a:xfrm>
-          <a:prstGeom prst="rect">
-            <a:avLst/>
-          </a:prstGeom>
-          <a:solidFill>
-            <a:srgbClr val="CBCEBD"/>
-          </a:solidFill>
-          <a:ln>
-            <a:noFill/>
-          </a:ln>
-          <a:effectLst/>
-        </p:spPr>
-        <p:style>
-          <a:lnRef idx="1">
-            <a:schemeClr val="accent1"/>
-          </a:lnRef>
-          <a:fillRef idx="3">
-            <a:schemeClr val="accent1"/>
-          </a:fillRef>
-          <a:effectRef idx="2">
-            <a:schemeClr val="accent1"/>
-          </a:effectRef>
-          <a:fontRef idx="minor">
-            <a:schemeClr val="lt1"/>
-          </a:fontRef>
-        </p:style>
-        <p:txBody>
-          <a:bodyPr rtlCol="0" anchor="ctr"/>
-          <a:lstStyle/>
-          <a:p>
-            <a:pPr algn="ctr"/>
-          </a:p>
-        </p:txBody>
-      </p:sp>
-      <p:sp>
-        <p:nvSpPr>
-          <p:cNvPr id="11" name="Rectangle 10"/>
-          <p:cNvSpPr/>
-          <p:nvPr/>
-        </p:nvSpPr>
-        <p:spPr>
-          <a:xfrm>
-            <a:off x="6562725" y="5929312"/>
-            <a:ext cx="9525" cy="2857500"/>
-          </a:xfrm>
-          <a:prstGeom prst="rect">
-            <a:avLst/>
-          </a:prstGeom>
-          <a:solidFill>
-            <a:srgbClr val="CBCEBD"/>
-          </a:solidFill>
-          <a:ln>
-            <a:noFill/>
-          </a:ln>
-          <a:effectLst/>
-        </p:spPr>
-        <p:style>
-          <a:lnRef idx="1">
-            <a:schemeClr val="accent1"/>
-          </a:lnRef>
-          <a:fillRef idx="3">
-            <a:schemeClr val="accent1"/>
-          </a:fillRef>
-          <a:effectRef idx="2">
-            <a:schemeClr val="accent1"/>
-          </a:effectRef>
-          <a:fontRef idx="minor">
-            <a:schemeClr val="lt1"/>
-          </a:fontRef>
-        </p:style>
-        <p:txBody>
-          <a:bodyPr rtlCol="0" anchor="ctr"/>
-          <a:lstStyle/>
-          <a:p>
-            <a:pPr algn="ctr"/>
-          </a:p>
-        </p:txBody>
-      </p:sp>
-      <p:sp>
-        <p:nvSpPr>
-          <p:cNvPr id="12" name="Rectangle 11"/>
-          <p:cNvSpPr/>
-          <p:nvPr/>
-        </p:nvSpPr>
-        <p:spPr>
-          <a:xfrm>
             <a:off x="4110038" y="16535400"/>
             <a:ext cx="2066925" cy="9525"/>
           </a:xfrm>
@@ -3574,7 +3354,7 @@
       </p:sp>
       <p:sp>
         <p:nvSpPr>
-          <p:cNvPr id="13" name="Rectangle 12"/>
+          <p:cNvPr id="8" name="Rectangle 7"/>
           <p:cNvSpPr/>
           <p:nvPr/>
         </p:nvSpPr>
@@ -3618,7 +3398,7 @@
       </p:sp>
       <p:sp>
         <p:nvSpPr>
-          <p:cNvPr id="14" name="Rectangle 13"/>
+          <p:cNvPr id="9" name="Rectangle 8"/>
           <p:cNvSpPr/>
           <p:nvPr/>
         </p:nvSpPr>
@@ -3662,7 +3442,7 @@
       </p:sp>
       <p:sp>
         <p:nvSpPr>
-          <p:cNvPr id="15" name="Rectangle 14"/>
+          <p:cNvPr id="10" name="Rectangle 9"/>
           <p:cNvSpPr/>
           <p:nvPr/>
         </p:nvSpPr>
@@ -3706,7 +3486,7 @@
       </p:sp>
       <p:sp>
         <p:nvSpPr>
-          <p:cNvPr id="16" name="TextBox 15"/>
+          <p:cNvPr id="11" name="TextBox 10"/>
           <p:cNvSpPr txBox="1"/>
           <p:nvPr/>
         </p:nvSpPr>
@@ -3745,7 +3525,7 @@
       </p:sp>
       <p:sp>
         <p:nvSpPr>
-          <p:cNvPr id="17" name="TextBox 16"/>
+          <p:cNvPr id="12" name="TextBox 11"/>
           <p:cNvSpPr txBox="1"/>
           <p:nvPr/>
         </p:nvSpPr>
@@ -3784,7 +3564,7 @@
       </p:sp>
       <p:sp>
         <p:nvSpPr>
-          <p:cNvPr id="18" name="TextBox 17"/>
+          <p:cNvPr id="13" name="TextBox 12"/>
           <p:cNvSpPr txBox="1"/>
           <p:nvPr/>
         </p:nvSpPr>
@@ -3819,7 +3599,7 @@
       </p:sp>
       <p:sp>
         <p:nvSpPr>
-          <p:cNvPr id="19" name="TextBox 18"/>
+          <p:cNvPr id="14" name="TextBox 13"/>
           <p:cNvSpPr txBox="1"/>
           <p:nvPr/>
         </p:nvSpPr>
@@ -3854,42 +3634,7 @@
       </p:sp>
       <p:sp>
         <p:nvSpPr>
-          <p:cNvPr id="20" name="TextBox 19"/>
-          <p:cNvSpPr txBox="1"/>
-          <p:nvPr/>
-        </p:nvSpPr>
-        <p:spPr>
-          <a:xfrm>
-            <a:off x="4316537" y="7277100"/>
-            <a:ext cx="1653778" cy="161925"/>
-          </a:xfrm>
-          <a:prstGeom prst="rect">
-            <a:avLst/>
-          </a:prstGeom>
-          <a:noFill/>
-        </p:spPr>
-        <p:txBody>
-          <a:bodyPr wrap="none" anchor="t" lIns="0" rIns="0" tIns="0" bIns="0"/>
-          <a:lstStyle/>
-          <a:p>
-            <a:pPr algn="ctr"/>
-            <a:r>
-              <a:rPr sz="825" i="0" b="0" spc="247">
-                <a:solidFill>
-                  <a:srgbClr val="8A867E"/>
-                </a:solidFill>
-                <a:latin typeface="Poppins"/>
-                <a:ea typeface="Poppins"/>
-                <a:cs typeface="Poppins"/>
-              </a:rPr>
-              <a:t>HEADSHOT</a:t>
-            </a:r>
-          </a:p>
-        </p:txBody>
-      </p:sp>
-      <p:sp>
-        <p:nvSpPr>
-          <p:cNvPr id="21" name="TextBox 20"/>
+          <p:cNvPr id="15" name="TextBox 14"/>
           <p:cNvSpPr txBox="1"/>
           <p:nvPr/>
         </p:nvSpPr>
@@ -3924,7 +3669,7 @@
       </p:sp>
       <p:sp>
         <p:nvSpPr>
-          <p:cNvPr id="22" name="TextBox 21"/>
+          <p:cNvPr id="16" name="TextBox 15"/>
           <p:cNvSpPr txBox="1"/>
           <p:nvPr/>
         </p:nvSpPr>
@@ -3959,7 +3704,7 @@
       </p:sp>
       <p:sp>
         <p:nvSpPr>
-          <p:cNvPr id="23" name="TextBox 22"/>
+          <p:cNvPr id="17" name="TextBox 16"/>
           <p:cNvSpPr txBox="1"/>
           <p:nvPr/>
         </p:nvSpPr>
@@ -3998,7 +3743,7 @@
       </p:sp>
       <p:sp>
         <p:nvSpPr>
-          <p:cNvPr id="24" name="TextBox 23"/>
+          <p:cNvPr id="18" name="TextBox 17"/>
           <p:cNvSpPr txBox="1"/>
           <p:nvPr/>
         </p:nvSpPr>
@@ -4033,7 +3778,7 @@
       </p:sp>
       <p:sp>
         <p:nvSpPr>
-          <p:cNvPr id="25" name="TextBox 24"/>
+          <p:cNvPr id="19" name="TextBox 18"/>
           <p:cNvSpPr txBox="1"/>
           <p:nvPr/>
         </p:nvSpPr>
@@ -4066,6 +3811,30 @@
           </a:p>
         </p:txBody>
       </p:sp>
+      <p:pic>
+        <p:nvPicPr>
+          <p:cNvPr id="20" name="Picture 19" descr="bright-18-story-about_17.png"/>
+          <p:cNvPicPr>
+            <a:picLocks noChangeAspect="1"/>
+          </p:cNvPicPr>
+          <p:nvPr/>
+        </p:nvPicPr>
+        <p:blipFill>
+          <a:blip r:embed="rId2"/>
+          <a:stretch>
+            <a:fillRect/>
+          </a:stretch>
+        </p:blipFill>
+        <p:spPr>
+          <a:xfrm>
+            <a:off x="3714750" y="5929312"/>
+            <a:ext cx="2857500" cy="2857500"/>
+          </a:xfrm>
+          <a:prstGeom prst="rect">
+            <a:avLst/>
+          </a:prstGeom>
+        </p:spPr>
+      </p:pic>
     </p:spTree>
   </p:cSld>
   <p:clrMapOvr>

--- a/bright-18-story-about.pptx
+++ b/bright-18-story-about.pptx
@@ -3140,7 +3140,7 @@
         </p:nvSpPr>
         <p:spPr>
           <a:xfrm>
-            <a:off x="857250" y="1504950"/>
+            <a:off x="857250" y="1724025"/>
             <a:ext cx="8572500" cy="9525"/>
           </a:xfrm>
           <a:prstGeom prst="rect">
@@ -3184,7 +3184,7 @@
         </p:nvSpPr>
         <p:spPr>
           <a:xfrm>
-            <a:off x="857250" y="866775"/>
+            <a:off x="857250" y="976312"/>
             <a:ext cx="381000" cy="381000"/>
           </a:xfrm>
           <a:prstGeom prst="ellipse">
@@ -3228,7 +3228,7 @@
         </p:nvSpPr>
         <p:spPr>
           <a:xfrm>
-            <a:off x="3608040" y="5457825"/>
+            <a:off x="3507581" y="5486400"/>
             <a:ext cx="666750" cy="9525"/>
           </a:xfrm>
           <a:prstGeom prst="rect">
@@ -3272,7 +3272,7 @@
         </p:nvSpPr>
         <p:spPr>
           <a:xfrm>
-            <a:off x="6012210" y="5457825"/>
+            <a:off x="6112520" y="5486400"/>
             <a:ext cx="666750" cy="9525"/>
           </a:xfrm>
           <a:prstGeom prst="rect">
@@ -3316,8 +3316,8 @@
         </p:nvSpPr>
         <p:spPr>
           <a:xfrm>
-            <a:off x="3673822" y="16221075"/>
-            <a:ext cx="2939355" cy="9525"/>
+            <a:off x="3344912" y="16011525"/>
+            <a:ext cx="3597176" cy="9525"/>
           </a:xfrm>
           <a:prstGeom prst="rect">
             <a:avLst/>
@@ -3360,8 +3360,8 @@
         </p:nvSpPr>
         <p:spPr>
           <a:xfrm>
-            <a:off x="3673822" y="16935450"/>
-            <a:ext cx="2939355" cy="9525"/>
+            <a:off x="3344912" y="16859250"/>
+            <a:ext cx="3597176" cy="9525"/>
           </a:xfrm>
           <a:prstGeom prst="rect">
             <a:avLst/>
@@ -3404,8 +3404,8 @@
         </p:nvSpPr>
         <p:spPr>
           <a:xfrm>
-            <a:off x="3673822" y="16221075"/>
-            <a:ext cx="9525" cy="723900"/>
+            <a:off x="3344912" y="16011525"/>
+            <a:ext cx="9525" cy="857250"/>
           </a:xfrm>
           <a:prstGeom prst="rect">
             <a:avLst/>
@@ -3448,8 +3448,8 @@
         </p:nvSpPr>
         <p:spPr>
           <a:xfrm>
-            <a:off x="6603653" y="16221075"/>
-            <a:ext cx="9525" cy="723900"/>
+            <a:off x="6932563" y="16011525"/>
+            <a:ext cx="9525" cy="857250"/>
           </a:xfrm>
           <a:prstGeom prst="rect">
             <a:avLst/>
@@ -3492,8 +3492,8 @@
         </p:nvSpPr>
         <p:spPr>
           <a:xfrm>
-            <a:off x="919162" y="971550"/>
-            <a:ext cx="792480" cy="171450"/>
+            <a:off x="912019" y="1076325"/>
+            <a:ext cx="815340" cy="180975"/>
           </a:xfrm>
           <a:prstGeom prst="rect">
             <a:avLst/>
@@ -3510,7 +3510,7 @@
               </a:lnSpc>
             </a:pPr>
             <a:r>
-              <a:rPr sz="1350" i="0" b="0">
+              <a:rPr sz="1425" i="0" b="0">
                 <a:solidFill>
                   <a:srgbClr val="97A98C"/>
                 </a:solidFill>
@@ -3532,7 +3532,7 @@
         <p:spPr>
           <a:xfrm>
             <a:off x="1390650" y="857250"/>
-            <a:ext cx="3282315" cy="228600"/>
+            <a:ext cx="5962650" cy="266700"/>
           </a:xfrm>
           <a:prstGeom prst="rect">
             <a:avLst/>
@@ -3549,7 +3549,7 @@
               </a:lnSpc>
             </a:pPr>
             <a:r>
-              <a:rPr sz="1800" i="0" b="0">
+              <a:rPr sz="2100" i="0" b="0">
                 <a:solidFill>
                   <a:srgbClr val="33322E"/>
                 </a:solidFill>
@@ -3570,8 +3570,8 @@
         </p:nvSpPr>
         <p:spPr>
           <a:xfrm>
-            <a:off x="1390650" y="1133475"/>
-            <a:ext cx="3282315" cy="123825"/>
+            <a:off x="1390650" y="1200150"/>
+            <a:ext cx="5962650" cy="276225"/>
           </a:xfrm>
           <a:prstGeom prst="rect">
             <a:avLst/>
@@ -3584,7 +3584,7 @@
           <a:p>
             <a:pPr algn="l"/>
             <a:r>
-              <a:rPr sz="637" i="0" b="0" spc="216">
+              <a:rPr sz="1425" i="0" b="0" spc="313">
                 <a:solidFill>
                   <a:srgbClr val="8A867E"/>
                 </a:solidFill>
@@ -3605,8 +3605,8 @@
         </p:nvSpPr>
         <p:spPr>
           <a:xfrm>
-            <a:off x="3867864" y="5334000"/>
-            <a:ext cx="2551271" cy="257175"/>
+            <a:off x="3707175" y="5334000"/>
+            <a:ext cx="2872502" cy="314325"/>
           </a:xfrm>
           <a:prstGeom prst="rect">
             <a:avLst/>
@@ -3619,7 +3619,7 @@
           <a:p>
             <a:pPr algn="ctr"/>
             <a:r>
-              <a:rPr sz="1350" i="0" b="0" spc="486">
+              <a:rPr sz="1650" i="0" b="0" spc="495">
                 <a:solidFill>
                   <a:srgbClr val="97A98C"/>
                 </a:solidFill>
@@ -3640,7 +3640,7 @@
         </p:nvSpPr>
         <p:spPr>
           <a:xfrm>
-            <a:off x="-1905000" y="9172575"/>
+            <a:off x="-1905000" y="9229725"/>
             <a:ext cx="14097000" cy="952500"/>
           </a:xfrm>
           <a:prstGeom prst="rect">
@@ -3675,8 +3675,8 @@
         </p:nvSpPr>
         <p:spPr>
           <a:xfrm>
-            <a:off x="-1905000" y="10258425"/>
-            <a:ext cx="14097000" cy="238125"/>
+            <a:off x="-1905000" y="10334625"/>
+            <a:ext cx="14097000" cy="276225"/>
           </a:xfrm>
           <a:prstGeom prst="rect">
             <a:avLst/>
@@ -3689,7 +3689,7 @@
           <a:p>
             <a:pPr algn="ctr"/>
             <a:r>
-              <a:rPr sz="1200" i="0" b="0" spc="336">
+              <a:rPr sz="1425" i="0" b="0" spc="313">
                 <a:solidFill>
                   <a:srgbClr val="8A867E"/>
                 </a:solidFill>
@@ -3710,7 +3710,7 @@
         </p:nvSpPr>
         <p:spPr>
           <a:xfrm>
-            <a:off x="1428750" y="10820400"/>
+            <a:off x="1428750" y="10934700"/>
             <a:ext cx="7429500" cy="777180"/>
           </a:xfrm>
           <a:prstGeom prst="rect">
@@ -3749,8 +3749,8 @@
         </p:nvSpPr>
         <p:spPr>
           <a:xfrm>
-            <a:off x="3673822" y="16221075"/>
-            <a:ext cx="2939355" cy="723900"/>
+            <a:off x="3344912" y="16011525"/>
+            <a:ext cx="3597176" cy="857250"/>
           </a:xfrm>
           <a:prstGeom prst="rect">
             <a:avLst/>
@@ -3763,7 +3763,7 @@
           <a:p>
             <a:pPr algn="ctr"/>
             <a:r>
-              <a:rPr sz="1500" i="0" b="0" spc="390">
+              <a:rPr sz="2025" i="0" b="0" spc="445">
                 <a:solidFill>
                   <a:srgbClr val="97A98C"/>
                 </a:solidFill>
@@ -3784,8 +3784,8 @@
         </p:nvSpPr>
         <p:spPr>
           <a:xfrm>
-            <a:off x="-1905000" y="17211675"/>
-            <a:ext cx="14097000" cy="219075"/>
+            <a:off x="-1905000" y="17154525"/>
+            <a:ext cx="14097000" cy="276225"/>
           </a:xfrm>
           <a:prstGeom prst="rect">
             <a:avLst/>
@@ -3798,7 +3798,7 @@
           <a:p>
             <a:pPr algn="ctr"/>
             <a:r>
-              <a:rPr sz="1125" i="0" b="0" spc="292">
+              <a:rPr sz="1425" i="0" b="0" spc="313">
                 <a:solidFill>
                   <a:srgbClr val="8A867E"/>
                 </a:solidFill>
@@ -3827,7 +3827,7 @@
         </p:blipFill>
         <p:spPr>
           <a:xfrm>
-            <a:off x="3714750" y="5972175"/>
+            <a:off x="3714750" y="6029325"/>
             <a:ext cx="2857500" cy="2857500"/>
           </a:xfrm>
           <a:prstGeom prst="rect">
